--- a/docs/presentations/Damage_Modeling_From_Basics.pptx
+++ b/docs/presentations/Damage_Modeling_From_Basics.pptx
@@ -11530,7 +11530,7 @@
                 <a:ea typeface="Consolas" pitchFamily="34" charset="-122"/>
                 <a:cs typeface="Consolas" pitchFamily="34" charset="-120"/>
               </a:rPr>
-              <a:t>Read next:  SCOPE_AND_STORY.md  ·  the build methodology doc  ·  the notebooks (hail/solar, flood/solar)</a:t>
+              <a:t>Read next:  github.com/aamani-ai/Damage_Modeling  ·  SCOPE_AND_STORY.md  ·  the hail &amp; flood worked-reference docs  ·  the notebooks</a:t>
             </a:r>
             <a:endParaRPr lang="en-US" sz="1050" dirty="0"/>
           </a:p>
